--- a/public/fun/pack/pptx/birthdaypro/돌잔치프리미엄_35_첫번째이야기중심_오닉스골드.pptx
+++ b/public/fun/pack/pptx/birthdaypro/돌잔치프리미엄_35_첫번째이야기중심_오닉스골드.pptx
@@ -112,12 +112,12 @@
   <p:extLst>
     <p:ext uri="{521415D9-36F7-43E2-AB2F-B90AF26B5E84}">
       <p14:sectionLst xmlns:p14="http://schemas.microsoft.com/office/powerpoint/2010/main">
-        <p14:section name="시작" id="{62A52CDA-251F-4BF9-9DD7-524DEC62E3B9}">
+        <p14:section name="시작" id="{C3EEAE3A-8F78-42B6-A542-ED28FBD48CEA}">
           <p14:sldIdLst>
             <p14:sldId id="256"/>
           </p14:sldIdLst>
         </p14:section>
-        <p14:section name="본문" id="{9CC9D333-F4E8-4B6C-95B8-21666C571F1C}">
+        <p14:section name="본문" id="{93BF41F4-C9E0-4D39-8D2A-2BE4FFC85905}">
           <p14:sldIdLst>
             <p14:sldId id="257"/>
             <p14:sldId id="258"/>
@@ -125,7 +125,7 @@
             <p14:sldId id="260"/>
           </p14:sldIdLst>
         </p14:section>
-        <p14:section name="마무리" id="{8EC2EB40-1E2E-4C83-80EF-18B18E8AEA73}">
+        <p14:section name="마무리" id="{8A3A240B-65B1-4307-848C-909139722047}">
           <p14:sldIdLst>
             <p14:sldId id="261"/>
           </p14:sldIdLst>
@@ -1476,7 +1476,7 @@
             </a:lvl1pPr>
           </a:lstStyle>
           <a:p>
-            <a:fld id="{8848AD08-78F0-4AA8-8BE1-DE286014C1F4}" type="slidenum">
+            <a:fld id="{6F69764E-B4E3-4D71-B45B-4D9EFA8C5928}" type="slidenum">
               <a:rPr lang="en-US"/>
               <a:t>‹#›</a:t>
             </a:fld>
@@ -2505,7 +2505,7 @@
             </a:lvl1pPr>
           </a:lstStyle>
           <a:p>
-            <a:fld id="{E53D0C84-9946-4A61-8F1C-B6EF7501DE7D}" type="slidenum">
+            <a:fld id="{208652D4-44B6-416F-9CA6-3C22710912D7}" type="slidenum">
               <a:rPr lang="en-US"/>
               <a:t>‹#›</a:t>
             </a:fld>
@@ -3507,7 +3507,7 @@
             </a:lvl1pPr>
           </a:lstStyle>
           <a:p>
-            <a:fld id="{613FC0D6-3D36-4D82-86A3-8D35A5CF98C5}" type="slidenum">
+            <a:fld id="{DE5977B4-23D2-4D61-906D-7FE9D74BF142}" type="slidenum">
               <a:rPr lang="en-US"/>
               <a:t>‹#›</a:t>
             </a:fld>
@@ -4670,7 +4670,7 @@
           <a:p>
             <a:r>
               <a:rPr lang="ko-KR"/>
-              <a:t>백일 떡을 돌리던 날이 생각납니다</a:t>
+              <a:t>떡을 돌리던 날이 생각납니다</a:t>
             </a:r>
           </a:p>
         </p:txBody>
@@ -4692,7 +4692,7 @@
           <a:p>
             <a:r>
               <a:rPr lang="ko-KR"/>
-              <a:t>아기 이름 · 0000. 00. 00</a:t>
+              <a:t>아기 이름 · 날짜 입력</a:t>
             </a:r>
           </a:p>
           <a:p>
@@ -4854,7 +4854,7 @@
           <a:bodyPr/>
           <a:lstStyle/>
           <a:p>
-            <a:fld id="{FEC02F3F-F527-411D-AD82-0F038E6BF9D9}" type="slidenum">
+            <a:fld id="{77B33C2C-EC4B-488A-86B6-6246C684FB5A}" type="slidenum">
               <a:rPr lang="en-US"/>
               <a:t>‹#›</a:t>
             </a:fld>
@@ -5454,7 +5454,7 @@
           <a:bodyPr/>
           <a:lstStyle/>
           <a:p>
-            <a:fld id="{9AB727BC-63B3-41E4-9F61-7283D09DA98A}" type="slidenum">
+            <a:fld id="{1382BB90-9D90-4423-AC60-25BB1B107D92}" type="slidenum">
               <a:rPr lang="en-US"/>
               <a:t>‹#›</a:t>
             </a:fld>
@@ -6429,7 +6429,7 @@
           <a:bodyPr/>
           <a:lstStyle/>
           <a:p>
-            <a:fld id="{CDB128A3-D323-47B7-9243-1188BB21BCD1}" type="slidenum">
+            <a:fld id="{32F077B0-6F3B-4698-9C5F-D93F47BF85F7}" type="slidenum">
               <a:rPr lang="en-US"/>
               <a:t>‹#›</a:t>
             </a:fld>
@@ -8055,7 +8055,7 @@
           <a:bodyPr/>
           <a:lstStyle/>
           <a:p>
-            <a:fld id="{42065E86-1442-4707-879A-0CEB837FA966}" type="slidenum">
+            <a:fld id="{92CB6C67-D8BB-4137-934A-CC405005E44E}" type="slidenum">
               <a:rPr lang="en-US"/>
               <a:t>‹#›</a:t>
             </a:fld>
